--- a/PITCH.pptx
+++ b/PITCH.pptx
@@ -3190,13 +3190,13 @@
               </a:spcAft>
             </a:pPr>
             <a:r>
-              <a:rPr sz="2400" b="0">
+              <a:rPr sz="2600" b="0">
                 <a:solidFill>
                   <a:srgbClr val="4CC9F0"/>
                 </a:solidFill>
                 <a:latin typeface="Calibri"/>
               </a:rPr>
-              <a:t>Reading vehicle safety complaints and routing them to the right system</a:t>
+              <a:t>Is your car problem a safety issue?</a:t>
             </a:r>
           </a:p>
           <a:p>
@@ -3375,7 +3375,7 @@
                 </a:solidFill>
                 <a:latin typeface="Calibri"/>
               </a:rPr>
-              <a:t>Drivers file hundreds of thousands of safety complaints with NHTSA every year</a:t>
+              <a:t>Your car does something odd, a noise, a warning light, a scary moment</a:t>
             </a:r>
           </a:p>
           <a:p>
@@ -3391,7 +3391,7 @@
                 </a:solidFill>
                 <a:latin typeface="Calibri"/>
               </a:rPr>
-              <a:t>Every complaint has to be tagged with the vehicle system it is about</a:t>
+              <a:t>Most owners cannot tell a real safety defect from a harmless quirk</a:t>
             </a:r>
           </a:p>
           <a:p>
@@ -3407,7 +3407,7 @@
                 </a:solidFill>
                 <a:latin typeface="Calibri"/>
               </a:rPr>
-              <a:t>That tagging is mostly manual today, so it is slow and inconsistent</a:t>
+              <a:t>So they worry over nothing, or keep driving through a real problem</a:t>
             </a:r>
           </a:p>
           <a:p>
@@ -3423,7 +3423,7 @@
                 </a:solidFill>
                 <a:latin typeface="Calibri"/>
               </a:rPr>
-              <a:t>These complaints are the early warning for recalls, so speed matters</a:t>
+              <a:t>Recalls start from owner complaints, but only if people recognise and report them</a:t>
             </a:r>
           </a:p>
         </p:txBody>
@@ -3531,7 +3531,7 @@
                 </a:solidFill>
                 <a:latin typeface="Calibri"/>
               </a:rPr>
-              <a:t>What we built</a:t>
+              <a:t>What I built</a:t>
             </a:r>
           </a:p>
         </p:txBody>
@@ -3570,7 +3570,7 @@
                 </a:solidFill>
                 <a:latin typeface="Calibri"/>
               </a:rPr>
-              <a:t>Reads the owner's own words and predicts one of 14 vehicle systems in under a second</a:t>
+              <a:t>Describe the problem in plain words, the way you would tell a friend</a:t>
             </a:r>
           </a:p>
           <a:p>
@@ -3586,7 +3586,7 @@
                 </a:solidFill>
                 <a:latin typeface="Calibri"/>
               </a:rPr>
-              <a:t>Flags how safety-critical the system is and suggests where to route the report</a:t>
+              <a:t>It tells you which of 14 car systems it is, and how serious that system is</a:t>
             </a:r>
           </a:p>
           <a:p>
@@ -3602,7 +3602,7 @@
                 </a:solidFill>
                 <a:latin typeface="Calibri"/>
               </a:rPr>
-              <a:t>Trained on about 37,000 real NHTSA complaints across 14 car makes</a:t>
+              <a:t>And whether it is worth reporting to NHTSA</a:t>
             </a:r>
           </a:p>
           <a:p>
@@ -3618,7 +3618,7 @@
                 </a:solidFill>
                 <a:latin typeface="Calibri"/>
               </a:rPr>
-              <a:t>Not a black box, it shows the exact words behind every decision</a:t>
+              <a:t>It shows the exact words behind the call, so you can decide to trust it</a:t>
             </a:r>
           </a:p>
         </p:txBody>
@@ -3797,7 +3797,7 @@
                 </a:solidFill>
                 <a:latin typeface="Calibri"/>
               </a:rPr>
-              <a:t>Prediction, confidence, and the top 3 candidate systems</a:t>
+              <a:t>Most likely system, confidence, and the other systems it could be</a:t>
             </a:r>
           </a:p>
           <a:p>
@@ -3813,7 +3813,7 @@
                 </a:solidFill>
                 <a:latin typeface="Calibri"/>
               </a:rPr>
-              <a:t>Highlighted words that drove the call, plus a safety triage banner</a:t>
+              <a:t>The words that drove the call, plus a safety tier and a plain next step</a:t>
             </a:r>
           </a:p>
           <a:p>
@@ -3937,7 +3937,7 @@
                 </a:solidFill>
                 <a:latin typeface="Calibri"/>
               </a:rPr>
-              <a:t>Three models, one honest comparison</a:t>
+              <a:t>Three models, judged honestly</a:t>
             </a:r>
           </a:p>
         </p:txBody>
@@ -4594,7 +4594,7 @@
                 </a:solidFill>
                 <a:latin typeface="Calibri"/>
               </a:rPr>
-              <a:t>What we learned</a:t>
+              <a:t>What I learned</a:t>
             </a:r>
           </a:p>
         </p:txBody>
@@ -4665,7 +4665,7 @@
                 </a:solidFill>
                 <a:latin typeface="Calibri"/>
               </a:rPr>
-              <a:t>The classical model stays a bit more robust to typos and noise</a:t>
+              <a:t>For a safety tool, honesty matters: it says 'not sure' instead of a false all-clear</a:t>
             </a:r>
           </a:p>
           <a:p>
@@ -4828,7 +4828,7 @@
                 </a:solidFill>
                 <a:latin typeface="Calibri"/>
               </a:rPr>
-              <a:t>Manual triage becomes real-time triage</a:t>
+              <a:t>Turn a helpless worry into a clear read and a next step</a:t>
             </a:r>
           </a:p>
           <a:p>
@@ -4844,7 +4844,7 @@
                 </a:solidFill>
                 <a:latin typeface="Calibri"/>
               </a:rPr>
-              <a:t>The same engine fits a marketplace, a manufacturer, or a fleet</a:t>
+              <a:t>Every good report an owner files also feeds the recall system</a:t>
             </a:r>
           </a:p>
           <a:p>
@@ -4860,7 +4860,7 @@
                 </a:solidFill>
                 <a:latin typeface="Calibri"/>
               </a:rPr>
-              <a:t>Live on the cloud, a small model, no GPU, and transparent</a:t>
+              <a:t>Live on the cloud, a small model, no GPU, and it explains itself</a:t>
             </a:r>
           </a:p>
           <a:p>
@@ -4876,7 +4876,7 @@
                 </a:solidFill>
                 <a:latin typeface="Calibri"/>
               </a:rPr>
-              <a:t>The ask: a partner complaint stream and a pilot with one quality team</a:t>
+              <a:t>The ask: put it in a car marketplace or claims flow and test it with real owners</a:t>
             </a:r>
           </a:p>
         </p:txBody>

--- a/PITCH.pptx
+++ b/PITCH.pptx
@@ -13,6 +13,7 @@
     <p:sldId id="261" r:id="rId12"/>
     <p:sldId id="262" r:id="rId13"/>
     <p:sldId id="263" r:id="rId14"/>
+    <p:sldId id="264" r:id="rId15"/>
   </p:sldIdLst>
   <p:sldSz cx="12191695" cy="6858000" type="screen4x3"/>
   <p:notesSz cx="6858000" cy="9144000"/>
@@ -3726,7 +3727,7 @@
                 </a:solidFill>
                 <a:latin typeface="Calibri"/>
               </a:rPr>
-              <a:t>Live demo</a:t>
+              <a:t>Why this is new work</a:t>
             </a:r>
           </a:p>
           <a:p>
@@ -3742,7 +3743,7 @@
                 </a:solidFill>
                 <a:latin typeface="Calibri"/>
               </a:rPr>
-              <a:t>Let the screen do the talking</a:t>
+              <a:t>Different data, question, model, and user</a:t>
             </a:r>
           </a:p>
         </p:txBody>
@@ -3781,7 +3782,7 @@
                 </a:solidFill>
                 <a:latin typeface="Calibri"/>
               </a:rPr>
-              <a:t>autotriage-ai-unfvnsiy6a-uc.a.run.app</a:t>
+              <a:t>Not my hackathon: that was sentiment on consumer reviews, fine-tuned DistilBERT</a:t>
             </a:r>
           </a:p>
           <a:p>
@@ -3797,7 +3798,7 @@
                 </a:solidFill>
                 <a:latin typeface="Calibri"/>
               </a:rPr>
-              <a:t>Most likely system, confidence, and the other systems it could be</a:t>
+              <a:t>This is safety complaints, which system failed, a TextCNN with GloVe</a:t>
             </a:r>
           </a:p>
           <a:p>
@@ -3813,7 +3814,7 @@
                 </a:solidFill>
                 <a:latin typeface="Calibri"/>
               </a:rPr>
-              <a:t>The words that drove the call, plus a safety tier and a plain next step</a:t>
+              <a:t>Published work on this database clusters it for regulators (Ghazizadeh et al., 2014)</a:t>
             </a:r>
           </a:p>
           <a:p>
@@ -3829,7 +3830,7 @@
                 </a:solidFill>
                 <a:latin typeface="Calibri"/>
               </a:rPr>
-              <a:t>Flip between the naive, classical, and deep models on the same text</a:t>
+              <a:t>I pointed the same data at the owner, with explanations and a safety tier</a:t>
             </a:r>
           </a:p>
         </p:txBody>
@@ -3937,7 +3938,23 @@
                 </a:solidFill>
                 <a:latin typeface="Calibri"/>
               </a:rPr>
-              <a:t>Three models, judged honestly</a:t>
+              <a:t>Live demo</a:t>
+            </a:r>
+          </a:p>
+          <a:p>
+            <a:pPr algn="l">
+              <a:spcAft>
+                <a:spcPts val="400"/>
+              </a:spcAft>
+            </a:pPr>
+            <a:r>
+              <a:rPr sz="1800" b="0">
+                <a:solidFill>
+                  <a:srgbClr val="93A0BD"/>
+                </a:solidFill>
+                <a:latin typeface="Calibri"/>
+              </a:rPr>
+              <a:t>Let the screen do the talking</a:t>
             </a:r>
           </a:p>
         </p:txBody>
@@ -3976,7 +3993,7 @@
                 </a:solidFill>
                 <a:latin typeface="Calibri"/>
               </a:rPr>
-              <a:t>Naive baseline, majority class, the accuracy floor</a:t>
+              <a:t>autotriage-ai-unfvnsiy6a-uc.a.run.app</a:t>
             </a:r>
           </a:p>
           <a:p>
@@ -3992,7 +4009,7 @@
                 </a:solidFill>
                 <a:latin typeface="Calibri"/>
               </a:rPr>
-              <a:t>Classical, TF-IDF with class-weighted Logistic Regression</a:t>
+              <a:t>Most likely system, confidence, and the other systems it could be</a:t>
             </a:r>
           </a:p>
           <a:p>
@@ -4008,7 +4025,7 @@
                 </a:solidFill>
                 <a:latin typeface="Calibri"/>
               </a:rPr>
-              <a:t>Deep, TextCNN with GloVe transfer learning, the deployed model</a:t>
+              <a:t>The words that drove the call, plus a safety tier and a plain next step</a:t>
             </a:r>
           </a:p>
           <a:p>
@@ -4024,7 +4041,7 @@
                 </a:solidFill>
                 <a:latin typeface="Calibri"/>
               </a:rPr>
-              <a:t>The data is long-tailed, so we judge on macro-F1, not accuracy</a:t>
+              <a:t>Flip between the naive, classical, and deep models on the same text</a:t>
             </a:r>
           </a:p>
         </p:txBody>
@@ -4038,6 +4055,201 @@
 </file>
 
 <file path=ppt/slides/slide6.xml><?xml version="1.0" encoding="utf-8"?>
+<p:sld xmlns:a="http://schemas.openxmlformats.org/drawingml/2006/main" xmlns:p="http://schemas.openxmlformats.org/presentationml/2006/main" xmlns:r="http://schemas.openxmlformats.org/officeDocument/2006/relationships">
+  <p:cSld>
+    <p:bg>
+      <p:bgPr>
+        <a:solidFill>
+          <a:srgbClr val="0B1020"/>
+        </a:solidFill>
+        <a:effectLst/>
+      </p:bgPr>
+    </p:bg>
+    <p:spTree>
+      <p:nvGrpSpPr>
+        <p:cNvPr id="1" name=""/>
+        <p:cNvGrpSpPr/>
+        <p:nvPr/>
+      </p:nvGrpSpPr>
+      <p:grpSpPr/>
+      <p:sp>
+        <p:nvSpPr>
+          <p:cNvPr id="2" name="Rectangle 1"/>
+          <p:cNvSpPr/>
+          <p:nvPr/>
+        </p:nvSpPr>
+        <p:spPr>
+          <a:xfrm>
+            <a:off x="822960" y="640080"/>
+            <a:ext cx="146304" cy="502920"/>
+          </a:xfrm>
+          <a:prstGeom prst="rect">
+            <a:avLst/>
+          </a:prstGeom>
+          <a:solidFill>
+            <a:srgbClr val="4CC9F0"/>
+          </a:solidFill>
+          <a:ln>
+            <a:noFill/>
+          </a:ln>
+        </p:spPr>
+        <p:style>
+          <a:lnRef idx="1">
+            <a:schemeClr val="accent1"/>
+          </a:lnRef>
+          <a:fillRef idx="3">
+            <a:schemeClr val="accent1"/>
+          </a:fillRef>
+          <a:effectRef idx="2">
+            <a:schemeClr val="accent1"/>
+          </a:effectRef>
+          <a:fontRef idx="minor">
+            <a:schemeClr val="lt1"/>
+          </a:fontRef>
+        </p:style>
+        <p:txBody>
+          <a:bodyPr rtlCol="0" anchor="ctr"/>
+          <a:lstStyle/>
+          <a:p>
+            <a:pPr algn="ctr"/>
+          </a:p>
+        </p:txBody>
+      </p:sp>
+      <p:sp>
+        <p:nvSpPr>
+          <p:cNvPr id="3" name="TextBox 2"/>
+          <p:cNvSpPr txBox="1"/>
+          <p:nvPr/>
+        </p:nvSpPr>
+        <p:spPr>
+          <a:xfrm>
+            <a:off x="1097280" y="566928"/>
+            <a:ext cx="10058400" cy="914400"/>
+          </a:xfrm>
+          <a:prstGeom prst="rect">
+            <a:avLst/>
+          </a:prstGeom>
+          <a:noFill/>
+        </p:spPr>
+        <p:txBody>
+          <a:bodyPr wrap="square" anchor="t">
+            <a:spAutoFit/>
+          </a:bodyPr>
+          <a:lstStyle/>
+          <a:p>
+            <a:pPr algn="l">
+              <a:spcAft>
+                <a:spcPts val="1000"/>
+              </a:spcAft>
+            </a:pPr>
+            <a:r>
+              <a:rPr sz="3400" b="1">
+                <a:solidFill>
+                  <a:srgbClr val="E8EDF7"/>
+                </a:solidFill>
+                <a:latin typeface="Calibri"/>
+              </a:rPr>
+              <a:t>Three models, judged honestly</a:t>
+            </a:r>
+          </a:p>
+        </p:txBody>
+      </p:sp>
+      <p:sp>
+        <p:nvSpPr>
+          <p:cNvPr id="4" name="TextBox 3"/>
+          <p:cNvSpPr txBox="1"/>
+          <p:nvPr/>
+        </p:nvSpPr>
+        <p:spPr>
+          <a:xfrm>
+            <a:off x="1097280" y="1783080"/>
+            <a:ext cx="10058400" cy="4572000"/>
+          </a:xfrm>
+          <a:prstGeom prst="rect">
+            <a:avLst/>
+          </a:prstGeom>
+          <a:noFill/>
+        </p:spPr>
+        <p:txBody>
+          <a:bodyPr wrap="square" anchor="t">
+            <a:spAutoFit/>
+          </a:bodyPr>
+          <a:lstStyle/>
+          <a:p>
+            <a:pPr algn="l">
+              <a:spcAft>
+                <a:spcPts val="1800"/>
+              </a:spcAft>
+            </a:pPr>
+            <a:r>
+              <a:rPr sz="2200" b="0">
+                <a:solidFill>
+                  <a:srgbClr val="E8EDF7"/>
+                </a:solidFill>
+                <a:latin typeface="Calibri"/>
+              </a:rPr>
+              <a:t>Naive baseline, majority class, the accuracy floor</a:t>
+            </a:r>
+          </a:p>
+          <a:p>
+            <a:pPr algn="l">
+              <a:spcAft>
+                <a:spcPts val="1800"/>
+              </a:spcAft>
+            </a:pPr>
+            <a:r>
+              <a:rPr sz="2200" b="0">
+                <a:solidFill>
+                  <a:srgbClr val="E8EDF7"/>
+                </a:solidFill>
+                <a:latin typeface="Calibri"/>
+              </a:rPr>
+              <a:t>Classical, TF-IDF with class-weighted Logistic Regression</a:t>
+            </a:r>
+          </a:p>
+          <a:p>
+            <a:pPr algn="l">
+              <a:spcAft>
+                <a:spcPts val="1800"/>
+              </a:spcAft>
+            </a:pPr>
+            <a:r>
+              <a:rPr sz="2200" b="0">
+                <a:solidFill>
+                  <a:srgbClr val="E8EDF7"/>
+                </a:solidFill>
+                <a:latin typeface="Calibri"/>
+              </a:rPr>
+              <a:t>Deep, TextCNN with GloVe transfer learning, the deployed model</a:t>
+            </a:r>
+          </a:p>
+          <a:p>
+            <a:pPr algn="l">
+              <a:spcAft>
+                <a:spcPts val="1800"/>
+              </a:spcAft>
+            </a:pPr>
+            <a:r>
+              <a:rPr sz="2200" b="0">
+                <a:solidFill>
+                  <a:srgbClr val="E8EDF7"/>
+                </a:solidFill>
+                <a:latin typeface="Calibri"/>
+              </a:rPr>
+              <a:t>The data is long-tailed, so we judge on macro-F1, not accuracy</a:t>
+            </a:r>
+          </a:p>
+        </p:txBody>
+      </p:sp>
+    </p:spTree>
+  </p:cSld>
+  <p:clrMapOvr>
+    <a:masterClrMapping/>
+  </p:clrMapOvr>
+</p:sld>
+</file>
+
+<file path=ppt/slides/slide7.xml><?xml version="1.0" encoding="utf-8"?>
 <p:sld xmlns:a="http://schemas.openxmlformats.org/drawingml/2006/main" xmlns:p="http://schemas.openxmlformats.org/presentationml/2006/main" xmlns:r="http://schemas.openxmlformats.org/officeDocument/2006/relationships">
   <p:cSld>
     <p:bg>
@@ -4499,7 +4711,7 @@
 </p:sld>
 </file>
 
-<file path=ppt/slides/slide7.xml><?xml version="1.0" encoding="utf-8"?>
+<file path=ppt/slides/slide8.xml><?xml version="1.0" encoding="utf-8"?>
 <p:sld xmlns:a="http://schemas.openxmlformats.org/drawingml/2006/main" xmlns:p="http://schemas.openxmlformats.org/presentationml/2006/main" xmlns:r="http://schemas.openxmlformats.org/officeDocument/2006/relationships">
   <p:cSld>
     <p:bg>
@@ -4694,7 +4906,7 @@
 </p:sld>
 </file>
 
-<file path=ppt/slides/slide8.xml><?xml version="1.0" encoding="utf-8"?>
+<file path=ppt/slides/slide9.xml><?xml version="1.0" encoding="utf-8"?>
 <p:sld xmlns:a="http://schemas.openxmlformats.org/drawingml/2006/main" xmlns:p="http://schemas.openxmlformats.org/presentationml/2006/main" xmlns:r="http://schemas.openxmlformats.org/officeDocument/2006/relationships">
   <p:cSld>
     <p:bg>
